--- a/output/archive/VellacombeData/Clients/RI/VD-18-131/Readouts/RI13_route_readout_24Jan19.pptx
+++ b/output/archive/VellacombeData/Clients/RI/VD-18-131/Readouts/RI13_route_readout_24Jan19.pptx
@@ -4246,7 +4246,7 @@
               <a:rPr sz="2000">
                 <a:latin typeface="Times New Roman"/>
               </a:rPr>
-              <a:t>Ligand sits deeper in the pocket than the docking model assumed</a:t>
+              <a:t>Ligand sits deeper in the pocket than the docking model assumed (observed in the co-crystal structures)</a:t>
             </a:r>
           </a:p>
           <a:p>
@@ -4255,7 +4255,7 @@
               <a:rPr sz="2000">
                 <a:latin typeface="Times New Roman"/>
               </a:rPr>
-              <a:t>The bulky ortho substituent clashes with a backbone carbonyl</a:t>
+              <a:t>Overlaying the bulky ortho analogue on the observed pose predicts a clash with a backbone carbonyl</a:t>
             </a:r>
           </a:p>
           <a:p>
@@ -4264,7 +4264,7 @@
               <a:rPr sz="1700">
                 <a:latin typeface="Times New Roman"/>
               </a:rPr>
-              <a:t>Explains the flat SAR seen in the first analogue set</a:t>
+              <a:t>Hypothesis for the flat SAR in the first analogue set</a:t>
             </a:r>
           </a:p>
           <a:p>
@@ -4611,7 +4611,7 @@
               <a:rPr sz="1800">
                 <a:latin typeface="Times New Roman"/>
               </a:rPr>
-              <a:t>Common intermediate from route scout 1</a:t>
+              <a:t>Common intermediate RI13-INT-07 from route scout 1</a:t>
             </a:r>
           </a:p>
           <a:p>
@@ -4839,7 +4839,7 @@
               <a:rPr sz="2000">
                 <a:latin typeface="Times New Roman"/>
               </a:rPr>
-              <a:t>Regioisomer controlled below 2% by lower temperature</a:t>
+              <a:t>Regioisomer reduced by running step 1 at lower temperature (see route scout note RI13-RS-02)</a:t>
             </a:r>
           </a:p>
           <a:p>
@@ -5008,7 +5008,7 @@
               <a:rPr sz="2000">
                 <a:latin typeface="Times New Roman"/>
               </a:rPr>
-              <a:t>Delivery lot 1 for binding studies</a:t>
+              <a:t>Delivery lot RI13-L01 for binding studies: analogues RI13-001 to RI13-008</a:t>
             </a:r>
           </a:p>
           <a:p>
@@ -5017,7 +5017,7 @@
               <a:rPr sz="2000">
                 <a:latin typeface="Times New Roman"/>
               </a:rPr>
-              <a:t>Identity confirmed by 1H NMR and LCMS</a:t>
+              <a:t>Identity confirmed by 1H NMR and LC-MS</a:t>
             </a:r>
           </a:p>
           <a:p>
@@ -5026,7 +5026,7 @@
               <a:rPr sz="2000">
                 <a:latin typeface="Times New Roman"/>
               </a:rPr>
-              <a:t>All lots above the agreed purity threshold</a:t>
+              <a:t>Release records with the compound cards for lot RI13-L01</a:t>
             </a:r>
           </a:p>
         </p:txBody>
@@ -5186,7 +5186,7 @@
               <a:rPr sz="2000">
                 <a:latin typeface="Times New Roman"/>
               </a:rPr>
-              <a:t>All proposed analogues of the first design round isolated</a:t>
+              <a:t>All proposed analogues of the first design round isolated (RI13-001 to RI13-008)</a:t>
             </a:r>
           </a:p>
           <a:p>
@@ -5195,7 +5195,7 @@
               <a:rPr sz="2000">
                 <a:latin typeface="Times New Roman"/>
               </a:rPr>
-              <a:t>Two solvent-vector analogues proposed but not yet made</a:t>
+              <a:t>Two solvent-vector analogues (RI13-009, RI13-010) proposed but not yet made</a:t>
             </a:r>
           </a:p>
           <a:p>
